--- a/docs/thesis/Prezantimi_Florent_Latifi.pptx
+++ b/docs/thesis/Prezantimi_Florent_Latifi.pptx
@@ -5102,7 +5102,7 @@
               </a:defRPr>
             </a:pPr>
             <a:r>
-              <a:t>·  I kompiluar brenda projektit të vet, verdikti më i fortë ngjitet nga 2 te 46 nga 405 rishkrime të mostrës.</a:t>
+              <a:t>·  I kompiluar brenda projektit të vet, verdikti më i fortë ngjitet nga 1 te 46 nga 405 rishkrime të mostrës.</a:t>
             </a:r>
           </a:p>
           <a:p>
